--- a/ai-azure-course/series-deck.pptx
+++ b/ai-azure-course/series-deck.pptx
@@ -580,7 +580,7 @@
           <a:lstStyle/>
           <a:p>
             <a:r>
-              <a:t>Chapter 1 — the concept. Manage Azure by conversation, one short task at a time, from nothing installed up to governing every resource. The safety mindset runs through every episode: Read is safe and runs freely; Change is approved after you read the proposed command; Delete is always described and confirmed first (a CLAUDE.md rule enforces this even in bypass mode). The series stays Claude + Microsoft only — Bicep, Microsoft's own infrastructure-as-code language, and its official Azure MCP Server rather than a community one. The portal is not abandoned — it is opened often to see the result of a change.</a:t>
+              <a:t>Chapter 1 — the concept. Claude Code is framed as more than a tool — a co-worker you delegate to and ask for advice, while you stay in control. Manage Azure by conversation, one short task at a time, from nothing installed up to governing every resource. The safety mindset runs through every episode: Read is safe and runs freely; Change is approved after you read the proposed command; Delete is always described and confirmed first (a CLAUDE.md rule enforces this even in bypass mode). The series stays Claude + Microsoft only — Bicep, Microsoft's own infrastructure-as-code language, and its official Azure MCP Server rather than a community one. The portal is not abandoned — it is opened often to see the result of a change.</a:t>
             </a:r>
           </a:p>
         </p:txBody>
@@ -650,7 +650,7 @@
           <a:lstStyle/>
           <a:p>
             <a:r>
-              <a:t>Chapter 2 — Before you start. All a viewer needs is a machine with Visual Studio Code and an Azure subscription. Everything else — Claude Code, the Azure CLI, sign-in — is installed and configured on screen in Episode 1, which also creates the CLAUDE.md memory file. VS Code runs on Windows and on Mac.</a:t>
+              <a:t>Chapter 2 — Before you start. All a viewer needs is a machine with Visual Studio Code, a Claude Pro subscription (about USD 20 a month, which powers Claude Code), and an Azure subscription. Everything else — the Claude Code CLI, the Azure CLI, sign-in — is installed and configured on screen in Episode 1, which also creates the CLAUDE.md memory file. VS Code runs on Windows and on Mac.</a:t>
             </a:r>
           </a:p>
         </p:txBody>
@@ -860,7 +860,7 @@
           <a:lstStyle/>
           <a:p>
             <a:r>
-              <a:t>Chapter 5 — threads through every episode. The learning loop is the course spine: set a Goal, let Claude Try, Learn from the error, and save the proven pattern as a Skill — then it repeats. Six threads recur alongside it: Rely on Claude but verify; Authentication and identity; Review before running; Read versus change; Cost, clean-up and RBAC; and Document every change.</a:t>
+              <a:t>Chapter 5 — threads through every episode. The learning loop is the course spine: set a Goal, let Claude Try, Learn from the error, and save the proven pattern as a Skill — then it repeats. Above all, Claude is treated as a co-worker you delegate to and ask for advice, but whose output you always check and rein in. Six threads recur alongside it: Rely on Claude but verify; Authentication and identity; Review before running; Read versus change; Cost, clean-up and RBAC; and Document every change.</a:t>
             </a:r>
           </a:p>
         </p:txBody>
@@ -4650,8 +4650,8 @@
         </p:nvSpPr>
         <p:spPr>
           <a:xfrm>
-            <a:off x="822960" y="2084831"/>
-            <a:ext cx="10515600" cy="457200"/>
+            <a:off x="822960" y="1993392"/>
+            <a:ext cx="10515600" cy="731520"/>
           </a:xfrm>
           <a:prstGeom prst="rect">
             <a:avLst/>
@@ -4664,9 +4664,25 @@
           </a:bodyPr>
           <a:lstStyle/>
           <a:p>
+            <a:pPr algn="l">
+              <a:spcAft>
+                <a:spcPts val="300"/>
+              </a:spcAft>
+            </a:pPr>
+            <a:r>
+              <a:rPr sz="1500" b="1" i="0">
+                <a:solidFill>
+                  <a:srgbClr val="00517E"/>
+                </a:solidFill>
+                <a:latin typeface="DM Sans"/>
+              </a:rPr>
+              <a:t>Claude Code is more than a tool — a co-worker you delegate to, and always review.</a:t>
+            </a:r>
+          </a:p>
+          <a:p>
             <a:pPr algn="l"/>
             <a:r>
-              <a:rPr sz="1500" b="0" i="0">
+              <a:rPr sz="1350" b="0" i="0">
                 <a:solidFill>
                   <a:srgbClr val="888888"/>
                 </a:solidFill>
@@ -5584,7 +5600,7 @@
                 </a:solidFill>
                 <a:latin typeface="DM Sans"/>
               </a:rPr>
-              <a:t>All you need before Episode 1 — just two things:</a:t>
+              <a:t>All you need before Episode 1 — just three things:</a:t>
             </a:r>
           </a:p>
         </p:txBody>
@@ -5598,7 +5614,7 @@
         <p:spPr>
           <a:xfrm>
             <a:off x="822960" y="2697480"/>
-            <a:ext cx="5120640" cy="2240280"/>
+            <a:ext cx="3319272" cy="2240280"/>
           </a:xfrm>
           <a:prstGeom prst="rect">
             <a:avLst/>
@@ -5642,7 +5658,7 @@
         <p:spPr>
           <a:xfrm>
             <a:off x="822960" y="2697480"/>
-            <a:ext cx="128016" cy="2240280"/>
+            <a:ext cx="3319272" cy="118872"/>
           </a:xfrm>
           <a:prstGeom prst="rect">
             <a:avLst/>
@@ -5693,8 +5709,8 @@
         </p:blipFill>
         <p:spPr>
           <a:xfrm>
-            <a:off x="1280160" y="3273552"/>
-            <a:ext cx="1051560" cy="1051560"/>
+            <a:off x="1979676" y="3017520"/>
+            <a:ext cx="1005840" cy="1005840"/>
           </a:xfrm>
           <a:prstGeom prst="rect">
             <a:avLst/>
@@ -5709,8 +5725,8 @@
         </p:nvSpPr>
         <p:spPr>
           <a:xfrm>
-            <a:off x="2697479" y="3154680"/>
-            <a:ext cx="3063240" cy="1463040"/>
+            <a:off x="1097280" y="4160520"/>
+            <a:ext cx="2770632" cy="777240"/>
           </a:xfrm>
           <a:prstGeom prst="rect">
             <a:avLst/>
@@ -5718,18 +5734,18 @@
           <a:noFill/>
         </p:spPr>
         <p:txBody>
-          <a:bodyPr wrap="square" anchor="ctr" lIns="0" rIns="0" tIns="0" bIns="0">
+          <a:bodyPr wrap="square" anchor="t" lIns="0" rIns="0" tIns="0" bIns="0">
             <a:spAutoFit/>
           </a:bodyPr>
           <a:lstStyle/>
           <a:p>
-            <a:pPr algn="l">
+            <a:pPr algn="ctr">
               <a:spcAft>
-                <a:spcPts val="400"/>
+                <a:spcPts val="300"/>
               </a:spcAft>
             </a:pPr>
             <a:r>
-              <a:rPr sz="1900" b="1" i="0">
+              <a:rPr sz="1500" b="1" i="0">
                 <a:solidFill>
                   <a:srgbClr val="00517E"/>
                 </a:solidFill>
@@ -5739,9 +5755,9 @@
             </a:r>
           </a:p>
           <a:p>
-            <a:pPr algn="l"/>
-            <a:r>
-              <a:rPr sz="1250" b="0" i="0">
+            <a:pPr algn="ctr"/>
+            <a:r>
+              <a:rPr sz="1150" b="0" i="0">
                 <a:solidFill>
                   <a:srgbClr val="888888"/>
                 </a:solidFill>
@@ -5760,8 +5776,8 @@
         </p:nvSpPr>
         <p:spPr>
           <a:xfrm>
-            <a:off x="6263640" y="2697480"/>
-            <a:ext cx="5120640" cy="2240280"/>
+            <a:off x="4416552" y="2697480"/>
+            <a:ext cx="3319272" cy="2240280"/>
           </a:xfrm>
           <a:prstGeom prst="rect">
             <a:avLst/>
@@ -5804,8 +5820,8 @@
         </p:nvSpPr>
         <p:spPr>
           <a:xfrm>
-            <a:off x="6263640" y="2697480"/>
-            <a:ext cx="128016" cy="2240280"/>
+            <a:off x="4416552" y="2697480"/>
+            <a:ext cx="3319272" cy="118872"/>
           </a:xfrm>
           <a:prstGeom prst="rect">
             <a:avLst/>
@@ -5842,7 +5858,7 @@
       </p:sp>
       <p:pic>
         <p:nvPicPr>
-          <p:cNvPr id="14" name="Picture 13" descr="azure-blue.png"/>
+          <p:cNvPr id="14" name="Picture 13" descr="claude-blue.png"/>
           <p:cNvPicPr>
             <a:picLocks noChangeAspect="1"/>
           </p:cNvPicPr>
@@ -5856,8 +5872,8 @@
         </p:blipFill>
         <p:spPr>
           <a:xfrm>
-            <a:off x="6720840" y="3273552"/>
-            <a:ext cx="1051560" cy="1051560"/>
+            <a:off x="5573268" y="3017520"/>
+            <a:ext cx="1005840" cy="1005840"/>
           </a:xfrm>
           <a:prstGeom prst="rect">
             <a:avLst/>
@@ -5872,8 +5888,8 @@
         </p:nvSpPr>
         <p:spPr>
           <a:xfrm>
-            <a:off x="8138159" y="3154680"/>
-            <a:ext cx="3063240" cy="1463040"/>
+            <a:off x="4690872" y="4160520"/>
+            <a:ext cx="2770632" cy="777240"/>
           </a:xfrm>
           <a:prstGeom prst="rect">
             <a:avLst/>
@@ -5881,43 +5897,206 @@
           <a:noFill/>
         </p:spPr>
         <p:txBody>
-          <a:bodyPr wrap="square" anchor="ctr" lIns="0" rIns="0" tIns="0" bIns="0">
+          <a:bodyPr wrap="square" anchor="t" lIns="0" rIns="0" tIns="0" bIns="0">
             <a:spAutoFit/>
           </a:bodyPr>
           <a:lstStyle/>
           <a:p>
-            <a:pPr algn="l">
+            <a:pPr algn="ctr">
               <a:spcAft>
-                <a:spcPts val="400"/>
+                <a:spcPts val="300"/>
               </a:spcAft>
             </a:pPr>
             <a:r>
-              <a:rPr sz="1900" b="1" i="0">
+              <a:rPr sz="1500" b="1" i="0">
                 <a:solidFill>
                   <a:srgbClr val="00517E"/>
                 </a:solidFill>
                 <a:latin typeface="DM Sans"/>
               </a:rPr>
+              <a:t>A Claude Pro subscription</a:t>
+            </a:r>
+          </a:p>
+          <a:p>
+            <a:pPr algn="ctr"/>
+            <a:r>
+              <a:rPr sz="1150" b="0" i="0">
+                <a:solidFill>
+                  <a:srgbClr val="888888"/>
+                </a:solidFill>
+                <a:latin typeface="DM Sans"/>
+              </a:rPr>
+              <a:t>about USD 20 / month</a:t>
+            </a:r>
+          </a:p>
+        </p:txBody>
+      </p:sp>
+      <p:sp>
+        <p:nvSpPr>
+          <p:cNvPr id="16" name="Rectangle 15"/>
+          <p:cNvSpPr/>
+          <p:nvPr/>
+        </p:nvSpPr>
+        <p:spPr>
+          <a:xfrm>
+            <a:off x="8010144" y="2697480"/>
+            <a:ext cx="3319272" cy="2240280"/>
+          </a:xfrm>
+          <a:prstGeom prst="rect">
+            <a:avLst/>
+          </a:prstGeom>
+          <a:solidFill>
+            <a:srgbClr val="EBF2F5"/>
+          </a:solidFill>
+          <a:ln>
+            <a:noFill/>
+          </a:ln>
+          <a:effectLst/>
+        </p:spPr>
+        <p:style>
+          <a:lnRef idx="1">
+            <a:schemeClr val="accent1"/>
+          </a:lnRef>
+          <a:fillRef idx="3">
+            <a:schemeClr val="accent1"/>
+          </a:fillRef>
+          <a:effectRef idx="2">
+            <a:schemeClr val="accent1"/>
+          </a:effectRef>
+          <a:fontRef idx="minor">
+            <a:schemeClr val="lt1"/>
+          </a:fontRef>
+        </p:style>
+        <p:txBody>
+          <a:bodyPr rtlCol="0" anchor="ctr"/>
+          <a:lstStyle/>
+          <a:p>
+            <a:pPr algn="ctr"/>
+          </a:p>
+        </p:txBody>
+      </p:sp>
+      <p:sp>
+        <p:nvSpPr>
+          <p:cNvPr id="17" name="Rectangle 16"/>
+          <p:cNvSpPr/>
+          <p:nvPr/>
+        </p:nvSpPr>
+        <p:spPr>
+          <a:xfrm>
+            <a:off x="8010144" y="2697480"/>
+            <a:ext cx="3319272" cy="118872"/>
+          </a:xfrm>
+          <a:prstGeom prst="rect">
+            <a:avLst/>
+          </a:prstGeom>
+          <a:solidFill>
+            <a:srgbClr val="02B896"/>
+          </a:solidFill>
+          <a:ln>
+            <a:noFill/>
+          </a:ln>
+          <a:effectLst/>
+        </p:spPr>
+        <p:style>
+          <a:lnRef idx="1">
+            <a:schemeClr val="accent1"/>
+          </a:lnRef>
+          <a:fillRef idx="3">
+            <a:schemeClr val="accent1"/>
+          </a:fillRef>
+          <a:effectRef idx="2">
+            <a:schemeClr val="accent1"/>
+          </a:effectRef>
+          <a:fontRef idx="minor">
+            <a:schemeClr val="lt1"/>
+          </a:fontRef>
+        </p:style>
+        <p:txBody>
+          <a:bodyPr rtlCol="0" anchor="ctr"/>
+          <a:lstStyle/>
+          <a:p>
+            <a:pPr algn="ctr"/>
+          </a:p>
+        </p:txBody>
+      </p:sp>
+      <p:pic>
+        <p:nvPicPr>
+          <p:cNvPr id="18" name="Picture 17" descr="azure-blue.png"/>
+          <p:cNvPicPr>
+            <a:picLocks noChangeAspect="1"/>
+          </p:cNvPicPr>
+          <p:nvPr/>
+        </p:nvPicPr>
+        <p:blipFill>
+          <a:blip r:embed="rId4"/>
+          <a:stretch>
+            <a:fillRect/>
+          </a:stretch>
+        </p:blipFill>
+        <p:spPr>
+          <a:xfrm>
+            <a:off x="9166859" y="3017520"/>
+            <a:ext cx="1005840" cy="1005840"/>
+          </a:xfrm>
+          <a:prstGeom prst="rect">
+            <a:avLst/>
+          </a:prstGeom>
+        </p:spPr>
+      </p:pic>
+      <p:sp>
+        <p:nvSpPr>
+          <p:cNvPr id="19" name="TextBox 18"/>
+          <p:cNvSpPr txBox="1"/>
+          <p:nvPr/>
+        </p:nvSpPr>
+        <p:spPr>
+          <a:xfrm>
+            <a:off x="8284464" y="4160520"/>
+            <a:ext cx="2770632" cy="777240"/>
+          </a:xfrm>
+          <a:prstGeom prst="rect">
+            <a:avLst/>
+          </a:prstGeom>
+          <a:noFill/>
+        </p:spPr>
+        <p:txBody>
+          <a:bodyPr wrap="square" anchor="t" lIns="0" rIns="0" tIns="0" bIns="0">
+            <a:spAutoFit/>
+          </a:bodyPr>
+          <a:lstStyle/>
+          <a:p>
+            <a:pPr algn="ctr">
+              <a:spcAft>
+                <a:spcPts val="300"/>
+              </a:spcAft>
+            </a:pPr>
+            <a:r>
+              <a:rPr sz="1500" b="1" i="0">
+                <a:solidFill>
+                  <a:srgbClr val="00517E"/>
+                </a:solidFill>
+                <a:latin typeface="DM Sans"/>
+              </a:rPr>
               <a:t>An Azure subscription</a:t>
             </a:r>
           </a:p>
           <a:p>
-            <a:pPr algn="l"/>
-            <a:r>
-              <a:rPr sz="1250" b="0" i="0">
+            <a:pPr algn="ctr"/>
+            <a:r>
+              <a:rPr sz="1150" b="0" i="0">
                 <a:solidFill>
                   <a:srgbClr val="888888"/>
                 </a:solidFill>
                 <a:latin typeface="DM Sans"/>
               </a:rPr>
-              <a:t>any subscription you can sign into</a:t>
-            </a:r>
-          </a:p>
-        </p:txBody>
-      </p:sp>
-      <p:sp>
-        <p:nvSpPr>
-          <p:cNvPr id="16" name="Rounded Rectangle 15"/>
+              <a:t>any you can sign into</a:t>
+            </a:r>
+          </a:p>
+        </p:txBody>
+      </p:sp>
+      <p:sp>
+        <p:nvSpPr>
+          <p:cNvPr id="20" name="Rounded Rectangle 19"/>
           <p:cNvSpPr/>
           <p:nvPr/>
         </p:nvSpPr>
@@ -5963,7 +6142,7 @@
       </p:sp>
       <p:sp>
         <p:nvSpPr>
-          <p:cNvPr id="17" name="TextBox 16"/>
+          <p:cNvPr id="21" name="TextBox 20"/>
           <p:cNvSpPr txBox="1"/>
           <p:nvPr/>
         </p:nvSpPr>
@@ -5995,7 +6174,7 @@
                 </a:solidFill>
                 <a:latin typeface="DM Sans"/>
               </a:rPr>
-              <a:t>Everything else — Claude Code, the Azure CLI, sign-in, the CLAUDE.md memory file —</a:t>
+              <a:t>Everything else — the Claude Code CLI, the Azure CLI, sign-in, the CLAUDE.md memory file —</a:t>
             </a:r>
           </a:p>
           <a:p>
@@ -9138,7 +9317,7 @@
         </p:nvSpPr>
         <p:spPr>
           <a:xfrm>
-            <a:off x="822960" y="4498848"/>
+            <a:off x="822960" y="4389120"/>
             <a:ext cx="10515600" cy="365760"/>
           </a:xfrm>
           <a:prstGeom prst="rect">
@@ -9160,7 +9339,7 @@
                 </a:solidFill>
                 <a:latin typeface="DM Sans"/>
               </a:rPr>
-              <a:t>Six threads run alongside it</a:t>
+              <a:t>One stance, six threads</a:t>
             </a:r>
           </a:p>
         </p:txBody>
@@ -9173,8 +9352,71 @@
         </p:nvSpPr>
         <p:spPr>
           <a:xfrm>
-            <a:off x="822960" y="4864608"/>
-            <a:ext cx="3319272" cy="512064"/>
+            <a:off x="822960" y="4736592"/>
+            <a:ext cx="10506456" cy="438912"/>
+          </a:xfrm>
+          <a:prstGeom prst="roundRect">
+            <a:avLst>
+              <a:gd name="adj" fmla="val 50000"/>
+            </a:avLst>
+          </a:prstGeom>
+          <a:gradFill rotWithShape="1">
+            <a:gsLst>
+              <a:gs pos="0">
+                <a:srgbClr val="02B896"/>
+              </a:gs>
+              <a:gs pos="100000">
+                <a:srgbClr val="537780"/>
+              </a:gs>
+            </a:gsLst>
+            <a:lin scaled="0" ang="18900000"/>
+          </a:gradFill>
+          <a:ln>
+            <a:noFill/>
+          </a:ln>
+          <a:effectLst/>
+        </p:spPr>
+        <p:style>
+          <a:lnRef idx="1">
+            <a:schemeClr val="accent1"/>
+          </a:lnRef>
+          <a:fillRef idx="3">
+            <a:schemeClr val="accent1"/>
+          </a:fillRef>
+          <a:effectRef idx="2">
+            <a:schemeClr val="accent1"/>
+          </a:effectRef>
+          <a:fontRef idx="minor">
+            <a:schemeClr val="lt1"/>
+          </a:fontRef>
+        </p:style>
+        <p:txBody>
+          <a:bodyPr rtlCol="0" anchor="ctr" wrap="square" lIns="50800" rIns="50800" tIns="12700" bIns="12700"/>
+          <a:lstStyle/>
+          <a:p>
+            <a:pPr algn="ctr"/>
+            <a:r>
+              <a:rPr sz="1200" b="1" i="0">
+                <a:solidFill>
+                  <a:srgbClr val="FFFFFF"/>
+                </a:solidFill>
+                <a:latin typeface="DM Sans"/>
+              </a:rPr>
+              <a:t>A co-worker, not just a tool — you delegate the work, then verify it</a:t>
+            </a:r>
+          </a:p>
+        </p:txBody>
+      </p:sp>
+      <p:sp>
+        <p:nvSpPr>
+          <p:cNvPr id="24" name="Rounded Rectangle 23"/>
+          <p:cNvSpPr/>
+          <p:nvPr/>
+        </p:nvSpPr>
+        <p:spPr>
+          <a:xfrm>
+            <a:off x="822960" y="5303520"/>
+            <a:ext cx="3319272" cy="457200"/>
           </a:xfrm>
           <a:prstGeom prst="roundRect">
             <a:avLst>
@@ -9222,14 +9464,14 @@
       </p:sp>
       <p:sp>
         <p:nvSpPr>
-          <p:cNvPr id="24" name="Rounded Rectangle 23"/>
+          <p:cNvPr id="25" name="Rounded Rectangle 24"/>
           <p:cNvSpPr/>
           <p:nvPr/>
         </p:nvSpPr>
         <p:spPr>
           <a:xfrm>
-            <a:off x="4416552" y="4864608"/>
-            <a:ext cx="3319272" cy="512064"/>
+            <a:off x="4416552" y="5303520"/>
+            <a:ext cx="3319272" cy="457200"/>
           </a:xfrm>
           <a:prstGeom prst="roundRect">
             <a:avLst>
@@ -9277,14 +9519,14 @@
       </p:sp>
       <p:sp>
         <p:nvSpPr>
-          <p:cNvPr id="25" name="Rounded Rectangle 24"/>
+          <p:cNvPr id="26" name="Rounded Rectangle 25"/>
           <p:cNvSpPr/>
           <p:nvPr/>
         </p:nvSpPr>
         <p:spPr>
           <a:xfrm>
-            <a:off x="8010144" y="4864608"/>
-            <a:ext cx="3319272" cy="512064"/>
+            <a:off x="8010144" y="5303520"/>
+            <a:ext cx="3319272" cy="457200"/>
           </a:xfrm>
           <a:prstGeom prst="roundRect">
             <a:avLst>
@@ -9332,14 +9574,14 @@
       </p:sp>
       <p:sp>
         <p:nvSpPr>
-          <p:cNvPr id="26" name="Rounded Rectangle 25"/>
+          <p:cNvPr id="27" name="Rounded Rectangle 26"/>
           <p:cNvSpPr/>
           <p:nvPr/>
         </p:nvSpPr>
         <p:spPr>
           <a:xfrm>
-            <a:off x="822960" y="5468112"/>
-            <a:ext cx="3319272" cy="512064"/>
+            <a:off x="822960" y="5833872"/>
+            <a:ext cx="3319272" cy="457200"/>
           </a:xfrm>
           <a:prstGeom prst="roundRect">
             <a:avLst>
@@ -9387,14 +9629,14 @@
       </p:sp>
       <p:sp>
         <p:nvSpPr>
-          <p:cNvPr id="27" name="Rounded Rectangle 26"/>
+          <p:cNvPr id="28" name="Rounded Rectangle 27"/>
           <p:cNvSpPr/>
           <p:nvPr/>
         </p:nvSpPr>
         <p:spPr>
           <a:xfrm>
-            <a:off x="4416552" y="5468112"/>
-            <a:ext cx="3319272" cy="512064"/>
+            <a:off x="4416552" y="5833872"/>
+            <a:ext cx="3319272" cy="457200"/>
           </a:xfrm>
           <a:prstGeom prst="roundRect">
             <a:avLst>
@@ -9442,14 +9684,14 @@
       </p:sp>
       <p:sp>
         <p:nvSpPr>
-          <p:cNvPr id="28" name="Rounded Rectangle 27"/>
+          <p:cNvPr id="29" name="Rounded Rectangle 28"/>
           <p:cNvSpPr/>
           <p:nvPr/>
         </p:nvSpPr>
         <p:spPr>
           <a:xfrm>
-            <a:off x="8010144" y="5468112"/>
-            <a:ext cx="3319272" cy="512064"/>
+            <a:off x="8010144" y="5833872"/>
+            <a:ext cx="3319272" cy="457200"/>
           </a:xfrm>
           <a:prstGeom prst="roundRect">
             <a:avLst>

--- a/ai-azure-course/series-deck.pptx
+++ b/ai-azure-course/series-deck.pptx
@@ -510,7 +510,7 @@
           <a:lstStyle/>
           <a:p>
             <a:r>
-              <a:t>Title slide. The series teaches managing a whole Microsoft Azure subscription by chatting with Claude Code in VS Code — doing the work by conversation rather than clicking through the portal (the portal is still opened to see results). Langate visual style and content. Seven chapters plus a definitions appendix.</a:t>
+              <a:t>Title slide. The series teaches managing a whole Microsoft Azure subscription with AI, using Claude Code in VS Code — describing what you want in natural language rather than clicking through the portal (the portal is still opened to see results). Langate visual style and content. Seven chapters plus a definitions appendix.</a:t>
             </a:r>
           </a:p>
         </p:txBody>
@@ -580,7 +580,7 @@
           <a:lstStyle/>
           <a:p>
             <a:r>
-              <a:t>Chapter 1 — the concept. Claude Code is framed as more than a tool — a co-worker you delegate to and ask for advice, while you stay in control. Manage Azure by conversation, one short task at a time, from nothing installed up to governing every resource. The safety mindset runs through every episode: Read is safe and runs freely; Change is approved after you read the proposed command; Delete is always described and confirmed first (a CLAUDE.md rule enforces this even in bypass mode). The series stays Claude + Microsoft only — Bicep, Microsoft's own infrastructure-as-code language, and its official Azure MCP Server rather than a community one. The portal is not abandoned — it is opened often to see the result of a change.</a:t>
+              <a:t>Chapter 1 — the concept. Claude Code is framed as more than a tool — a co-worker you delegate to and ask for advice, while you stay in control. Manage Azure with AI, one short task at a time, from nothing installed up to governing every resource. The safety mindset runs through every episode: Read is safe and runs freely; Change is approved after you read the proposed command; Delete is always described and confirmed first (a CLAUDE.md rule enforces this even in bypass mode). The series stays Claude + Microsoft only — Bicep, Microsoft's own infrastructure-as-code language, and its official Azure MCP Server rather than a community one. The portal is not abandoned — it is opened often to see the result of a change.</a:t>
             </a:r>
           </a:p>
         </p:txBody>
@@ -790,7 +790,7 @@
           <a:lstStyle/>
           <a:p>
             <a:r>
-              <a:t>Chapter 4 — the running order. Nineteen episodes in seven groups, each standing on its own. The arc runs setup, explore, change, deploy, automate, host apps, govern. Web apps (App Service), containers (AKS / Container Apps), serverless (Functions), security posture (Defender for Cloud) and governance (Azure Policy) are now Episodes 15-19. Azure AI services is promoted to Episode 5 — the series theme of making things happen in every Azure area from a chat. A cost / clean-up habit runs throughout so nothing is left billing.</a:t>
+              <a:t>Chapter 4 — the running order. Nineteen episodes in seven groups, each standing on its own. The arc runs setup, explore, change, deploy, automate, host apps, govern. Web apps (App Service), containers (AKS / Container Apps), serverless (Functions), security posture (Defender for Cloud) and governance (Azure Policy) are now Episodes 15-19. Azure AI services is promoted to Episode 5 — the series theme of making things happen in every Azure area with AI. A cost / clean-up habit runs throughout so nothing is left billing.</a:t>
             </a:r>
           </a:p>
         </p:txBody>
@@ -4296,7 +4296,7 @@
                 </a:solidFill>
                 <a:latin typeface="DM Sans"/>
               </a:rPr>
-              <a:t>Managing a whole Azure subscription by chatting — the plan, chapter by chapter</a:t>
+              <a:t>Managing a whole Azure subscription with AI — the plan, chapter by chapter</a:t>
             </a:r>
           </a:p>
         </p:txBody>
@@ -4567,7 +4567,7 @@
                 </a:solidFill>
                 <a:latin typeface="DM Sans"/>
               </a:rPr>
-              <a:t>Manage Azure by chatting with Claude Code</a:t>
+              <a:t>Manage Azure with AI, using Claude Code</a:t>
             </a:r>
           </a:p>
         </p:txBody>
@@ -8435,7 +8435,7 @@
                 </a:solidFill>
                 <a:latin typeface="DM Sans"/>
               </a:rPr>
-              <a:t>making things happen in every Azure area from a chat.</a:t>
+              <a:t>making things happen in every Azure area with AI.</a:t>
             </a:r>
           </a:p>
         </p:txBody>
